--- a/dist/초3/영어/소리와문자/초3_영어_소리와문자_04_자음글자의소리_학생용.pptx
+++ b/dist/초3/영어/소리와문자/초3_영어_소리와문자_04_자음글자의소리_학생용.pptx
@@ -123,13 +123,13 @@
   <p:extLst>
     <p:ext uri="{521415D9-36F7-43E2-AB2F-B90AF26B5E84}">
       <p14:sectionLst xmlns:p14="http://schemas.microsoft.com/office/powerpoint/2010/main">
-        <p14:section name="도입" id="{48dc5613-d818-eaa2-13d9-606bb982d304}">
+        <p14:section name="도입" id="{c4acdba2-ee0e-f077-657b-9f4be7b8a7bc}">
           <p14:sldIdLst>
             <p14:sldId id="256"/>
             <p14:sldId id="257"/>
           </p14:sldIdLst>
         </p14:section>
-        <p14:section name="개념" id="{09f0d3ae-6baa-6b56-733d-0f44c5ea4209}">
+        <p14:section name="개념" id="{4ca69c39-627f-10bb-86ce-a841140ebb79}">
           <p14:sldIdLst>
             <p14:sldId id="258"/>
             <p14:sldId id="259"/>
@@ -141,31 +141,31 @@
             <p14:sldId id="267"/>
           </p14:sldIdLst>
         </p14:section>
-        <p14:section name="연습" id="{1361e884-ac78-7743-d7b8-47c0802fd76b}">
+        <p14:section name="연습" id="{5eeb74db-47c3-b50f-44d8-1667cfdf2471}">
           <p14:sldIdLst>
             <p14:sldId id="265"/>
             <p14:sldId id="266"/>
             <p14:sldId id="268"/>
           </p14:sldIdLst>
         </p14:section>
-        <p14:section name="개념" id="{c97768ed-f1ee-c37e-0514-258c9f59da8b}">
+        <p14:section name="개념" id="{df199cc4-fbdd-a7a4-3fe9-429888760129}">
           <p14:sldIdLst/>
         </p14:section>
-        <p14:section name="연습" id="{ab5f6fe2-f881-4c28-7993-559904780bbd}">
+        <p14:section name="연습" id="{cb94974e-e15f-ed02-86e8-853d5f6d7f30}">
           <p14:sldIdLst/>
         </p14:section>
-        <p14:section name="확인" id="{1adefd11-f66d-e006-5fe6-817701a3c644}">
+        <p14:section name="확인" id="{3b1ab65d-a480-84ad-9c9b-9027447a342b}">
           <p14:sldIdLst>
             <p14:sldId id="269"/>
             <p14:sldId id="270"/>
           </p14:sldIdLst>
         </p14:section>
-        <p14:section name="정리" id="{e3e40b6d-3ded-6332-639e-85fc83b9840b}">
+        <p14:section name="정리" id="{0709047f-18e3-7df4-0e72-94e833236451}">
           <p14:sldIdLst>
             <p14:sldId id="271"/>
           </p14:sldIdLst>
         </p14:section>
-        <p14:section name="보충" id="{56d0b47f-795c-24b0-57f0-d38ea7c41202}">
+        <p14:section name="보충" id="{659064df-1a3e-e30f-41c8-7ddd64b2e873}">
           <p14:sldIdLst>
             <p14:sldId id="272"/>
           </p14:sldIdLst>

--- a/dist/초3/영어/소리와문자/초3_영어_소리와문자_04_자음글자의소리_학생용.pptx
+++ b/dist/초3/영어/소리와문자/초3_영어_소리와문자_04_자음글자의소리_학생용.pptx
@@ -123,13 +123,13 @@
   <p:extLst>
     <p:ext uri="{521415D9-36F7-43E2-AB2F-B90AF26B5E84}">
       <p14:sectionLst xmlns:p14="http://schemas.microsoft.com/office/powerpoint/2010/main">
-        <p14:section name="도입" id="{c4acdba2-ee0e-f077-657b-9f4be7b8a7bc}">
+        <p14:section name="도입" id="{bccf136d-b2a3-410c-96ca-e689bcaeb621}">
           <p14:sldIdLst>
             <p14:sldId id="256"/>
             <p14:sldId id="257"/>
           </p14:sldIdLst>
         </p14:section>
-        <p14:section name="개념" id="{4ca69c39-627f-10bb-86ce-a841140ebb79}">
+        <p14:section name="개념" id="{2690e76f-a02e-1851-f8a8-631741c099fa}">
           <p14:sldIdLst>
             <p14:sldId id="258"/>
             <p14:sldId id="259"/>
@@ -141,31 +141,31 @@
             <p14:sldId id="267"/>
           </p14:sldIdLst>
         </p14:section>
-        <p14:section name="연습" id="{5eeb74db-47c3-b50f-44d8-1667cfdf2471}">
+        <p14:section name="연습" id="{b3e32313-6625-1e61-4dd9-be2ed7ff590c}">
           <p14:sldIdLst>
             <p14:sldId id="265"/>
             <p14:sldId id="266"/>
             <p14:sldId id="268"/>
           </p14:sldIdLst>
         </p14:section>
-        <p14:section name="개념" id="{df199cc4-fbdd-a7a4-3fe9-429888760129}">
+        <p14:section name="개념" id="{1d27587e-d87c-d171-c03a-be1bb5709df3}">
           <p14:sldIdLst/>
         </p14:section>
-        <p14:section name="연습" id="{cb94974e-e15f-ed02-86e8-853d5f6d7f30}">
+        <p14:section name="연습" id="{e8f5c408-6a45-6f46-8957-928815f85f8b}">
           <p14:sldIdLst/>
         </p14:section>
-        <p14:section name="확인" id="{3b1ab65d-a480-84ad-9c9b-9027447a342b}">
+        <p14:section name="확인" id="{0491f881-41a5-b111-bf70-f6dcbe5a1716}">
           <p14:sldIdLst>
             <p14:sldId id="269"/>
             <p14:sldId id="270"/>
           </p14:sldIdLst>
         </p14:section>
-        <p14:section name="정리" id="{0709047f-18e3-7df4-0e72-94e833236451}">
+        <p14:section name="정리" id="{ed830b03-9418-4b8a-d49c-8efcc73a7aff}">
           <p14:sldIdLst>
             <p14:sldId id="271"/>
           </p14:sldIdLst>
         </p14:section>
-        <p14:section name="보충" id="{659064df-1a3e-e30f-41c8-7ddd64b2e873}">
+        <p14:section name="보충" id="{5cd57103-b569-c102-a9d2-4075d2676533}">
           <p14:sldIdLst>
             <p14:sldId id="272"/>
           </p14:sldIdLst>
